--- a/Presentation_V2.0.pptx
+++ b/Presentation_V2.0.pptx
@@ -139,7 +139,7 @@
           <p:cNvPr id="2" name="Title 1">
             <a:extLst>
               <a:ext uri="{FF2B5EF4-FFF2-40B4-BE49-F238E27FC236}">
-                <a16:creationId xmlns:a16="http://schemas.microsoft.com/office/drawing/2014/main" id="{2C9496CD-DCA9-CAD5-B6FC-CEF18232E9AB}"/>
+                <a16:creationId xmlns:a16="http://schemas.microsoft.com/office/drawing/2014/main" id="{76070E83-D3A8-F9EC-0C06-82C83D092BDA}"/>
               </a:ext>
             </a:extLst>
           </p:cNvPr>
@@ -167,7 +167,7 @@
           <p:cNvPr id="3" name="Date Placeholder 2">
             <a:extLst>
               <a:ext uri="{FF2B5EF4-FFF2-40B4-BE49-F238E27FC236}">
-                <a16:creationId xmlns:a16="http://schemas.microsoft.com/office/drawing/2014/main" id="{4F5F8508-2DAA-F8E1-2CA8-13DEDCC98C74}"/>
+                <a16:creationId xmlns:a16="http://schemas.microsoft.com/office/drawing/2014/main" id="{D5DEFD7F-2F2C-B24F-0CEC-17CF87A54A37}"/>
               </a:ext>
             </a:extLst>
           </p:cNvPr>
@@ -183,9 +183,9 @@
           <a:bodyPr/>
           <a:lstStyle/>
           <a:p>
-            <a:fld id="{99D38D52-3B58-4CBE-8BB7-4FBB0AEABA15}" type="datetimeFigureOut">
+            <a:fld id="{EB66360B-7364-4819-A6EF-F00AB1EB1231}" type="datetimeFigureOut">
               <a:rPr lang="en-US" smtClean="0"/>
-              <a:t>3/30/2026</a:t>
+              <a:t>3/31/2026</a:t>
             </a:fld>
             <a:endParaRPr lang="en-US"/>
           </a:p>
@@ -196,7 +196,7 @@
           <p:cNvPr id="4" name="Footer Placeholder 3">
             <a:extLst>
               <a:ext uri="{FF2B5EF4-FFF2-40B4-BE49-F238E27FC236}">
-                <a16:creationId xmlns:a16="http://schemas.microsoft.com/office/drawing/2014/main" id="{CE0F386C-9D7F-8384-4057-21D9C82356C5}"/>
+                <a16:creationId xmlns:a16="http://schemas.microsoft.com/office/drawing/2014/main" id="{A1C084C0-BB72-967A-6CF6-9977FC5E0228}"/>
               </a:ext>
             </a:extLst>
           </p:cNvPr>
@@ -221,7 +221,7 @@
           <p:cNvPr id="5" name="Slide Number Placeholder 4">
             <a:extLst>
               <a:ext uri="{FF2B5EF4-FFF2-40B4-BE49-F238E27FC236}">
-                <a16:creationId xmlns:a16="http://schemas.microsoft.com/office/drawing/2014/main" id="{7475AC54-3650-60AC-E014-1199F6C73C3E}"/>
+                <a16:creationId xmlns:a16="http://schemas.microsoft.com/office/drawing/2014/main" id="{A9C6C909-4DDA-CA66-C32C-FF9413184342}"/>
               </a:ext>
             </a:extLst>
           </p:cNvPr>
@@ -237,7 +237,7 @@
           <a:bodyPr/>
           <a:lstStyle/>
           <a:p>
-            <a:fld id="{AB420223-7F90-4242-B773-741C6C29B4BA}" type="slidenum">
+            <a:fld id="{138BBAA5-D2E6-4A58-AD92-3B8AAFFD2BEE}" type="slidenum">
               <a:rPr lang="en-US" smtClean="0"/>
               <a:t>‹#›</a:t>
             </a:fld>
@@ -248,7 +248,7 @@
     </p:spTree>
     <p:extLst>
       <p:ext uri="{BB962C8B-B14F-4D97-AF65-F5344CB8AC3E}">
-        <p14:creationId xmlns:p14="http://schemas.microsoft.com/office/powerpoint/2010/main" val="1664302842"/>
+        <p14:creationId xmlns:p14="http://schemas.microsoft.com/office/powerpoint/2010/main" val="2440986498"/>
       </p:ext>
     </p:extLst>
   </p:cSld>
@@ -285,7 +285,7 @@
           <p:cNvPr id="2" name="Title Placeholder 1">
             <a:extLst>
               <a:ext uri="{FF2B5EF4-FFF2-40B4-BE49-F238E27FC236}">
-                <a16:creationId xmlns:a16="http://schemas.microsoft.com/office/drawing/2014/main" id="{2E7D6B8C-2A42-1A9E-7EA3-15DFDDACC09B}"/>
+                <a16:creationId xmlns:a16="http://schemas.microsoft.com/office/drawing/2014/main" id="{E1BCD840-CD81-4866-BDA7-8BEF4D138CBF}"/>
               </a:ext>
             </a:extLst>
           </p:cNvPr>
@@ -323,7 +323,7 @@
           <p:cNvPr id="3" name="Text Placeholder 2">
             <a:extLst>
               <a:ext uri="{FF2B5EF4-FFF2-40B4-BE49-F238E27FC236}">
-                <a16:creationId xmlns:a16="http://schemas.microsoft.com/office/drawing/2014/main" id="{CAAC5167-4982-762C-2A08-6DBDF8EF25C0}"/>
+                <a16:creationId xmlns:a16="http://schemas.microsoft.com/office/drawing/2014/main" id="{2347DA78-4CEE-23A6-BABD-A8CE7A1565BE}"/>
               </a:ext>
             </a:extLst>
           </p:cNvPr>
@@ -390,7 +390,7 @@
           <p:cNvPr id="4" name="Date Placeholder 3">
             <a:extLst>
               <a:ext uri="{FF2B5EF4-FFF2-40B4-BE49-F238E27FC236}">
-                <a16:creationId xmlns:a16="http://schemas.microsoft.com/office/drawing/2014/main" id="{EC07890B-D153-12C1-5D4E-2C9B47792FFA}"/>
+                <a16:creationId xmlns:a16="http://schemas.microsoft.com/office/drawing/2014/main" id="{1FB4F666-1618-E555-2E02-3693C943C3C4}"/>
               </a:ext>
             </a:extLst>
           </p:cNvPr>
@@ -424,9 +424,9 @@
             </a:lvl1pPr>
           </a:lstStyle>
           <a:p>
-            <a:fld id="{99D38D52-3B58-4CBE-8BB7-4FBB0AEABA15}" type="datetimeFigureOut">
+            <a:fld id="{EB66360B-7364-4819-A6EF-F00AB1EB1231}" type="datetimeFigureOut">
               <a:rPr lang="en-US" smtClean="0"/>
-              <a:t>3/30/2026</a:t>
+              <a:t>3/31/2026</a:t>
             </a:fld>
             <a:endParaRPr lang="en-US"/>
           </a:p>
@@ -437,7 +437,7 @@
           <p:cNvPr id="5" name="Footer Placeholder 4">
             <a:extLst>
               <a:ext uri="{FF2B5EF4-FFF2-40B4-BE49-F238E27FC236}">
-                <a16:creationId xmlns:a16="http://schemas.microsoft.com/office/drawing/2014/main" id="{F0CD32B5-07D0-1D9D-6C70-FD9D0106A975}"/>
+                <a16:creationId xmlns:a16="http://schemas.microsoft.com/office/drawing/2014/main" id="{08C762B8-ECBC-52A2-B5BB-2DAA7FAC6518}"/>
               </a:ext>
             </a:extLst>
           </p:cNvPr>
@@ -480,7 +480,7 @@
           <p:cNvPr id="6" name="Slide Number Placeholder 5">
             <a:extLst>
               <a:ext uri="{FF2B5EF4-FFF2-40B4-BE49-F238E27FC236}">
-                <a16:creationId xmlns:a16="http://schemas.microsoft.com/office/drawing/2014/main" id="{4B41E2AB-3D91-28A4-7651-9DDF68AFFA00}"/>
+                <a16:creationId xmlns:a16="http://schemas.microsoft.com/office/drawing/2014/main" id="{22BC2A56-0001-022B-C992-23CCB1801BCB}"/>
               </a:ext>
             </a:extLst>
           </p:cNvPr>
@@ -514,7 +514,7 @@
             </a:lvl1pPr>
           </a:lstStyle>
           <a:p>
-            <a:fld id="{AB420223-7F90-4242-B773-741C6C29B4BA}" type="slidenum">
+            <a:fld id="{138BBAA5-D2E6-4A58-AD92-3B8AAFFD2BEE}" type="slidenum">
               <a:rPr lang="en-US" smtClean="0"/>
               <a:t>‹#›</a:t>
             </a:fld>
@@ -525,7 +525,7 @@
     </p:spTree>
     <p:extLst>
       <p:ext uri="{BB962C8B-B14F-4D97-AF65-F5344CB8AC3E}">
-        <p14:creationId xmlns:p14="http://schemas.microsoft.com/office/powerpoint/2010/main" val="3175745709"/>
+        <p14:creationId xmlns:p14="http://schemas.microsoft.com/office/powerpoint/2010/main" val="2273987022"/>
       </p:ext>
     </p:extLst>
   </p:cSld>
@@ -844,7 +844,7 @@
           <p:cNvPr id="2" name="Title 1" hidden="1">
             <a:extLst>
               <a:ext uri="{FF2B5EF4-FFF2-40B4-BE49-F238E27FC236}">
-                <a16:creationId xmlns:a16="http://schemas.microsoft.com/office/drawing/2014/main" id="{274AE76B-385F-096D-C185-BB94252F0416}"/>
+                <a16:creationId xmlns:a16="http://schemas.microsoft.com/office/drawing/2014/main" id="{09CDE9A3-B8F7-DB3C-90B6-3217A09F3D6A}"/>
               </a:ext>
             </a:extLst>
           </p:cNvPr>
@@ -869,7 +869,7 @@
           <p:cNvPr id="3" name="Picture 2">
             <a:extLst>
               <a:ext uri="{FF2B5EF4-FFF2-40B4-BE49-F238E27FC236}">
-                <a16:creationId xmlns:a16="http://schemas.microsoft.com/office/drawing/2014/main" id="{38934AEA-CDE4-C951-4462-A9D97AD73F43}"/>
+                <a16:creationId xmlns:a16="http://schemas.microsoft.com/office/drawing/2014/main" id="{3AAAFDA6-EA5D-33D6-B9C8-103222926384}"/>
               </a:ext>
             </a:extLst>
           </p:cNvPr>
@@ -895,7 +895,7 @@
     </p:spTree>
     <p:extLst>
       <p:ext uri="{BB962C8B-B14F-4D97-AF65-F5344CB8AC3E}">
-        <p14:creationId xmlns:p14="http://schemas.microsoft.com/office/powerpoint/2010/main" val="2193793822"/>
+        <p14:creationId xmlns:p14="http://schemas.microsoft.com/office/powerpoint/2010/main" val="2460952674"/>
       </p:ext>
     </p:extLst>
   </p:cSld>
@@ -933,7 +933,7 @@
           <p:cNvPr id="2" name="Title 1" hidden="1">
             <a:extLst>
               <a:ext uri="{FF2B5EF4-FFF2-40B4-BE49-F238E27FC236}">
-                <a16:creationId xmlns:a16="http://schemas.microsoft.com/office/drawing/2014/main" id="{B85344DF-8528-6C2F-571E-08098C825193}"/>
+                <a16:creationId xmlns:a16="http://schemas.microsoft.com/office/drawing/2014/main" id="{FECE5C02-F7EB-5698-8AC5-0BE456311D3D}"/>
               </a:ext>
             </a:extLst>
           </p:cNvPr>
@@ -958,7 +958,7 @@
           <p:cNvPr id="3" name="Picture 2">
             <a:extLst>
               <a:ext uri="{FF2B5EF4-FFF2-40B4-BE49-F238E27FC236}">
-                <a16:creationId xmlns:a16="http://schemas.microsoft.com/office/drawing/2014/main" id="{FA94C3FD-1569-2440-B16A-03C26A850334}"/>
+                <a16:creationId xmlns:a16="http://schemas.microsoft.com/office/drawing/2014/main" id="{FDDDE926-271B-AF09-A69C-C879E072F6D5}"/>
               </a:ext>
             </a:extLst>
           </p:cNvPr>
@@ -984,7 +984,7 @@
     </p:spTree>
     <p:extLst>
       <p:ext uri="{BB962C8B-B14F-4D97-AF65-F5344CB8AC3E}">
-        <p14:creationId xmlns:p14="http://schemas.microsoft.com/office/powerpoint/2010/main" val="3915687901"/>
+        <p14:creationId xmlns:p14="http://schemas.microsoft.com/office/powerpoint/2010/main" val="163687914"/>
       </p:ext>
     </p:extLst>
   </p:cSld>
@@ -1022,7 +1022,7 @@
           <p:cNvPr id="2" name="Title 1" hidden="1">
             <a:extLst>
               <a:ext uri="{FF2B5EF4-FFF2-40B4-BE49-F238E27FC236}">
-                <a16:creationId xmlns:a16="http://schemas.microsoft.com/office/drawing/2014/main" id="{D8ECD646-EB8E-0808-1AFE-2B5919259A5F}"/>
+                <a16:creationId xmlns:a16="http://schemas.microsoft.com/office/drawing/2014/main" id="{6154325F-825B-81D1-7EA7-1A84122179B9}"/>
               </a:ext>
             </a:extLst>
           </p:cNvPr>
@@ -1047,7 +1047,7 @@
           <p:cNvPr id="3" name="Picture 2">
             <a:extLst>
               <a:ext uri="{FF2B5EF4-FFF2-40B4-BE49-F238E27FC236}">
-                <a16:creationId xmlns:a16="http://schemas.microsoft.com/office/drawing/2014/main" id="{E3867361-3908-DEE3-3958-1751D06132EF}"/>
+                <a16:creationId xmlns:a16="http://schemas.microsoft.com/office/drawing/2014/main" id="{DABB801A-FE92-61AC-F707-3ADDE60C30BD}"/>
               </a:ext>
             </a:extLst>
           </p:cNvPr>
@@ -1073,7 +1073,7 @@
     </p:spTree>
     <p:extLst>
       <p:ext uri="{BB962C8B-B14F-4D97-AF65-F5344CB8AC3E}">
-        <p14:creationId xmlns:p14="http://schemas.microsoft.com/office/powerpoint/2010/main" val="519254623"/>
+        <p14:creationId xmlns:p14="http://schemas.microsoft.com/office/powerpoint/2010/main" val="3704165215"/>
       </p:ext>
     </p:extLst>
   </p:cSld>
@@ -1111,7 +1111,7 @@
           <p:cNvPr id="2" name="Title 1" hidden="1">
             <a:extLst>
               <a:ext uri="{FF2B5EF4-FFF2-40B4-BE49-F238E27FC236}">
-                <a16:creationId xmlns:a16="http://schemas.microsoft.com/office/drawing/2014/main" id="{172E5ABE-2026-D04A-123B-21B16A8657FD}"/>
+                <a16:creationId xmlns:a16="http://schemas.microsoft.com/office/drawing/2014/main" id="{D3D169BF-DFC9-AC16-4AD1-F43B7617BCB7}"/>
               </a:ext>
             </a:extLst>
           </p:cNvPr>
@@ -1136,7 +1136,7 @@
           <p:cNvPr id="3" name="Picture 2">
             <a:extLst>
               <a:ext uri="{FF2B5EF4-FFF2-40B4-BE49-F238E27FC236}">
-                <a16:creationId xmlns:a16="http://schemas.microsoft.com/office/drawing/2014/main" id="{2F811082-BB94-EC67-0392-0231B2D25464}"/>
+                <a16:creationId xmlns:a16="http://schemas.microsoft.com/office/drawing/2014/main" id="{2BDED285-63B2-38F1-9472-0AD631BC8899}"/>
               </a:ext>
             </a:extLst>
           </p:cNvPr>
@@ -1162,7 +1162,7 @@
     </p:spTree>
     <p:extLst>
       <p:ext uri="{BB962C8B-B14F-4D97-AF65-F5344CB8AC3E}">
-        <p14:creationId xmlns:p14="http://schemas.microsoft.com/office/powerpoint/2010/main" val="2470171806"/>
+        <p14:creationId xmlns:p14="http://schemas.microsoft.com/office/powerpoint/2010/main" val="979819629"/>
       </p:ext>
     </p:extLst>
   </p:cSld>
@@ -1200,7 +1200,7 @@
           <p:cNvPr id="2" name="Title 1" hidden="1">
             <a:extLst>
               <a:ext uri="{FF2B5EF4-FFF2-40B4-BE49-F238E27FC236}">
-                <a16:creationId xmlns:a16="http://schemas.microsoft.com/office/drawing/2014/main" id="{0CCB4350-15B9-F551-6259-F83F05CF8730}"/>
+                <a16:creationId xmlns:a16="http://schemas.microsoft.com/office/drawing/2014/main" id="{80A81F43-2C70-08C6-D1EC-CF44BF442CCB}"/>
               </a:ext>
             </a:extLst>
           </p:cNvPr>
@@ -1225,7 +1225,7 @@
           <p:cNvPr id="3" name="Picture 2">
             <a:extLst>
               <a:ext uri="{FF2B5EF4-FFF2-40B4-BE49-F238E27FC236}">
-                <a16:creationId xmlns:a16="http://schemas.microsoft.com/office/drawing/2014/main" id="{A5D20C9D-4F71-C276-6E0A-B1AF5B963611}"/>
+                <a16:creationId xmlns:a16="http://schemas.microsoft.com/office/drawing/2014/main" id="{ED933A72-6446-38C5-B46A-70C02C92F90D}"/>
               </a:ext>
             </a:extLst>
           </p:cNvPr>
@@ -1251,7 +1251,7 @@
     </p:spTree>
     <p:extLst>
       <p:ext uri="{BB962C8B-B14F-4D97-AF65-F5344CB8AC3E}">
-        <p14:creationId xmlns:p14="http://schemas.microsoft.com/office/powerpoint/2010/main" val="1926907246"/>
+        <p14:creationId xmlns:p14="http://schemas.microsoft.com/office/powerpoint/2010/main" val="3966299276"/>
       </p:ext>
     </p:extLst>
   </p:cSld>
@@ -1289,7 +1289,7 @@
           <p:cNvPr id="2" name="Title 1" hidden="1">
             <a:extLst>
               <a:ext uri="{FF2B5EF4-FFF2-40B4-BE49-F238E27FC236}">
-                <a16:creationId xmlns:a16="http://schemas.microsoft.com/office/drawing/2014/main" id="{B35739C9-3A4C-1E60-119D-B1CF7DFA3762}"/>
+                <a16:creationId xmlns:a16="http://schemas.microsoft.com/office/drawing/2014/main" id="{49BECEAC-10E3-3FF3-2995-D98B33F997E2}"/>
               </a:ext>
             </a:extLst>
           </p:cNvPr>
@@ -1314,7 +1314,7 @@
           <p:cNvPr id="3" name="Picture 2">
             <a:extLst>
               <a:ext uri="{FF2B5EF4-FFF2-40B4-BE49-F238E27FC236}">
-                <a16:creationId xmlns:a16="http://schemas.microsoft.com/office/drawing/2014/main" id="{6A586083-2ED4-777E-CD5D-2DA7A1A1DEBA}"/>
+                <a16:creationId xmlns:a16="http://schemas.microsoft.com/office/drawing/2014/main" id="{1D381129-4FEC-72A6-72E0-408A8F135C6C}"/>
               </a:ext>
             </a:extLst>
           </p:cNvPr>
@@ -1340,7 +1340,7 @@
     </p:spTree>
     <p:extLst>
       <p:ext uri="{BB962C8B-B14F-4D97-AF65-F5344CB8AC3E}">
-        <p14:creationId xmlns:p14="http://schemas.microsoft.com/office/powerpoint/2010/main" val="604654646"/>
+        <p14:creationId xmlns:p14="http://schemas.microsoft.com/office/powerpoint/2010/main" val="1886903053"/>
       </p:ext>
     </p:extLst>
   </p:cSld>
@@ -1378,7 +1378,7 @@
           <p:cNvPr id="2" name="Title 1" hidden="1">
             <a:extLst>
               <a:ext uri="{FF2B5EF4-FFF2-40B4-BE49-F238E27FC236}">
-                <a16:creationId xmlns:a16="http://schemas.microsoft.com/office/drawing/2014/main" id="{ECA7D112-BC8F-6220-50ED-D6849858AE7B}"/>
+                <a16:creationId xmlns:a16="http://schemas.microsoft.com/office/drawing/2014/main" id="{6B9D4EFF-5A36-F077-F3B3-0817B4049BD6}"/>
               </a:ext>
             </a:extLst>
           </p:cNvPr>
@@ -1403,7 +1403,7 @@
           <p:cNvPr id="3" name="Picture 2">
             <a:extLst>
               <a:ext uri="{FF2B5EF4-FFF2-40B4-BE49-F238E27FC236}">
-                <a16:creationId xmlns:a16="http://schemas.microsoft.com/office/drawing/2014/main" id="{A328E055-14A8-E72B-CD88-0E1F6E356B4D}"/>
+                <a16:creationId xmlns:a16="http://schemas.microsoft.com/office/drawing/2014/main" id="{A92D182F-E4FB-2FB2-E7F4-34E0673F33B8}"/>
               </a:ext>
             </a:extLst>
           </p:cNvPr>
@@ -1429,7 +1429,7 @@
     </p:spTree>
     <p:extLst>
       <p:ext uri="{BB962C8B-B14F-4D97-AF65-F5344CB8AC3E}">
-        <p14:creationId xmlns:p14="http://schemas.microsoft.com/office/powerpoint/2010/main" val="3688876481"/>
+        <p14:creationId xmlns:p14="http://schemas.microsoft.com/office/powerpoint/2010/main" val="3713303514"/>
       </p:ext>
     </p:extLst>
   </p:cSld>
@@ -1467,7 +1467,7 @@
           <p:cNvPr id="2" name="Title 1" hidden="1">
             <a:extLst>
               <a:ext uri="{FF2B5EF4-FFF2-40B4-BE49-F238E27FC236}">
-                <a16:creationId xmlns:a16="http://schemas.microsoft.com/office/drawing/2014/main" id="{4AA138CB-67DF-BEAA-1543-B295D888411D}"/>
+                <a16:creationId xmlns:a16="http://schemas.microsoft.com/office/drawing/2014/main" id="{87E1469A-73BD-5671-0341-D9F74AF7E536}"/>
               </a:ext>
             </a:extLst>
           </p:cNvPr>
@@ -1492,7 +1492,7 @@
           <p:cNvPr id="3" name="Picture 2">
             <a:extLst>
               <a:ext uri="{FF2B5EF4-FFF2-40B4-BE49-F238E27FC236}">
-                <a16:creationId xmlns:a16="http://schemas.microsoft.com/office/drawing/2014/main" id="{89850780-6C54-F631-5C99-8591EFBEC746}"/>
+                <a16:creationId xmlns:a16="http://schemas.microsoft.com/office/drawing/2014/main" id="{705AB6C0-57A4-DD10-E070-CCE6051BE4FD}"/>
               </a:ext>
             </a:extLst>
           </p:cNvPr>
@@ -1518,7 +1518,7 @@
     </p:spTree>
     <p:extLst>
       <p:ext uri="{BB962C8B-B14F-4D97-AF65-F5344CB8AC3E}">
-        <p14:creationId xmlns:p14="http://schemas.microsoft.com/office/powerpoint/2010/main" val="485222199"/>
+        <p14:creationId xmlns:p14="http://schemas.microsoft.com/office/powerpoint/2010/main" val="1594884820"/>
       </p:ext>
     </p:extLst>
   </p:cSld>
@@ -1556,7 +1556,7 @@
           <p:cNvPr id="2" name="Title 1" hidden="1">
             <a:extLst>
               <a:ext uri="{FF2B5EF4-FFF2-40B4-BE49-F238E27FC236}">
-                <a16:creationId xmlns:a16="http://schemas.microsoft.com/office/drawing/2014/main" id="{1AE001A0-CC2D-A6E4-7801-443760876CEC}"/>
+                <a16:creationId xmlns:a16="http://schemas.microsoft.com/office/drawing/2014/main" id="{3CFAF6C9-BFD3-4F20-FE41-7099612F5EBD}"/>
               </a:ext>
             </a:extLst>
           </p:cNvPr>
@@ -1581,7 +1581,7 @@
           <p:cNvPr id="3" name="Picture 2">
             <a:extLst>
               <a:ext uri="{FF2B5EF4-FFF2-40B4-BE49-F238E27FC236}">
-                <a16:creationId xmlns:a16="http://schemas.microsoft.com/office/drawing/2014/main" id="{5D712D10-AB86-51AE-73D2-B3BC4969C231}"/>
+                <a16:creationId xmlns:a16="http://schemas.microsoft.com/office/drawing/2014/main" id="{0F3592AC-C635-12B9-E6D8-32F29471A278}"/>
               </a:ext>
             </a:extLst>
           </p:cNvPr>
@@ -1607,7 +1607,7 @@
     </p:spTree>
     <p:extLst>
       <p:ext uri="{BB962C8B-B14F-4D97-AF65-F5344CB8AC3E}">
-        <p14:creationId xmlns:p14="http://schemas.microsoft.com/office/powerpoint/2010/main" val="522915906"/>
+        <p14:creationId xmlns:p14="http://schemas.microsoft.com/office/powerpoint/2010/main" val="2757742105"/>
       </p:ext>
     </p:extLst>
   </p:cSld>
@@ -1645,7 +1645,7 @@
           <p:cNvPr id="2" name="Title 1" hidden="1">
             <a:extLst>
               <a:ext uri="{FF2B5EF4-FFF2-40B4-BE49-F238E27FC236}">
-                <a16:creationId xmlns:a16="http://schemas.microsoft.com/office/drawing/2014/main" id="{12953F6B-4900-1827-2A9C-ECD4A8575DA1}"/>
+                <a16:creationId xmlns:a16="http://schemas.microsoft.com/office/drawing/2014/main" id="{66C81F87-836A-C092-619D-4EE92E69EC22}"/>
               </a:ext>
             </a:extLst>
           </p:cNvPr>
@@ -1670,7 +1670,7 @@
           <p:cNvPr id="3" name="Picture 2">
             <a:extLst>
               <a:ext uri="{FF2B5EF4-FFF2-40B4-BE49-F238E27FC236}">
-                <a16:creationId xmlns:a16="http://schemas.microsoft.com/office/drawing/2014/main" id="{EE08C5F7-70D1-C2D2-E530-9A1045CD73D9}"/>
+                <a16:creationId xmlns:a16="http://schemas.microsoft.com/office/drawing/2014/main" id="{D206C160-A750-F35D-6AB7-1255877BB372}"/>
               </a:ext>
             </a:extLst>
           </p:cNvPr>
@@ -1696,7 +1696,7 @@
     </p:spTree>
     <p:extLst>
       <p:ext uri="{BB962C8B-B14F-4D97-AF65-F5344CB8AC3E}">
-        <p14:creationId xmlns:p14="http://schemas.microsoft.com/office/powerpoint/2010/main" val="3630670291"/>
+        <p14:creationId xmlns:p14="http://schemas.microsoft.com/office/powerpoint/2010/main" val="2899701649"/>
       </p:ext>
     </p:extLst>
   </p:cSld>
@@ -1734,7 +1734,7 @@
           <p:cNvPr id="2" name="Title 1" hidden="1">
             <a:extLst>
               <a:ext uri="{FF2B5EF4-FFF2-40B4-BE49-F238E27FC236}">
-                <a16:creationId xmlns:a16="http://schemas.microsoft.com/office/drawing/2014/main" id="{BFC06397-8619-D923-93D8-D5E6EC1961C8}"/>
+                <a16:creationId xmlns:a16="http://schemas.microsoft.com/office/drawing/2014/main" id="{6BC4C59F-E952-621F-51E4-72D63D62ABB7}"/>
               </a:ext>
             </a:extLst>
           </p:cNvPr>
@@ -1759,7 +1759,7 @@
           <p:cNvPr id="3" name="Picture 2">
             <a:extLst>
               <a:ext uri="{FF2B5EF4-FFF2-40B4-BE49-F238E27FC236}">
-                <a16:creationId xmlns:a16="http://schemas.microsoft.com/office/drawing/2014/main" id="{04FB618A-EC9D-830A-1B44-540E32663B1A}"/>
+                <a16:creationId xmlns:a16="http://schemas.microsoft.com/office/drawing/2014/main" id="{D7615D34-35DE-1882-8960-855CB6AF8E9B}"/>
               </a:ext>
             </a:extLst>
           </p:cNvPr>
@@ -1785,7 +1785,7 @@
     </p:spTree>
     <p:extLst>
       <p:ext uri="{BB962C8B-B14F-4D97-AF65-F5344CB8AC3E}">
-        <p14:creationId xmlns:p14="http://schemas.microsoft.com/office/powerpoint/2010/main" val="2097727965"/>
+        <p14:creationId xmlns:p14="http://schemas.microsoft.com/office/powerpoint/2010/main" val="1626802966"/>
       </p:ext>
     </p:extLst>
   </p:cSld>
